--- a/sayt/media/resources/2026/10/mehnat-muhofazasi-06-mavzu.pptx
+++ b/sayt/media/resources/2026/10/mehnat-muhofazasi-06-mavzu.pptx
@@ -17,7 +17,6 @@
     <p:sldId id="265" r:id="rId16"/>
     <p:sldId id="266" r:id="rId17"/>
     <p:sldId id="267" r:id="rId18"/>
-    <p:sldId id="268" r:id="rId19"/>
   </p:sldIdLst>
   <p:sldSz cx="12191695" cy="6858000" type="screen4x3"/>
   <p:notesSz cx="6858000" cy="9144000"/>
@@ -4493,7 +4492,7 @@
                 </a:solidFill>
                 <a:latin typeface="Segoe UI"/>
               </a:rPr>
-              <a:t>1 / 13</a:t>
+              <a:t>1 / 12</a:t>
             </a:r>
           </a:p>
         </p:txBody>
@@ -6420,7 +6419,7 @@
                 </a:solidFill>
                 <a:latin typeface="Segoe UI"/>
               </a:rPr>
-              <a:t>10 / 13</a:t>
+              <a:t>10 / 12</a:t>
             </a:r>
           </a:p>
         </p:txBody>
@@ -8061,1885 +8060,7 @@
                 </a:solidFill>
                 <a:latin typeface="Segoe UI"/>
               </a:rPr>
-              <a:t>11 / 13</a:t>
-            </a:r>
-          </a:p>
-        </p:txBody>
-      </p:sp>
-      <p:sp>
-        <p:nvSpPr>
-          <p:cNvPr id="34" name="TextBox 33"/>
-          <p:cNvSpPr txBox="1"/>
-          <p:nvPr/>
-        </p:nvSpPr>
-        <p:spPr>
-          <a:xfrm>
-            <a:off x="731520" y="566928"/>
-            <a:ext cx="11157801" cy="220344"/>
-          </a:xfrm>
-          <a:prstGeom prst="rect">
-            <a:avLst/>
-          </a:prstGeom>
-          <a:noFill/>
-        </p:spPr>
-        <p:txBody>
-          <a:bodyPr wrap="square" lIns="0" rIns="0" tIns="0" bIns="0" anchor="t">
-            <a:spAutoFit/>
-          </a:bodyPr>
-          <a:lstStyle/>
-          <a:p>
-            <a:pPr algn="l">
-              <a:lnSpc>
-                <a:spcPts val="1375"/>
-              </a:lnSpc>
-            </a:pPr>
-            <a:r>
-              <a:rPr sz="1100" b="1">
-                <a:solidFill>
-                  <a:srgbClr val="9E2A3A"/>
-                </a:solidFill>
-                <a:latin typeface="Segoe UI"/>
-              </a:rPr>
-              <a:t>6-MAVZU</a:t>
-            </a:r>
-          </a:p>
-        </p:txBody>
-      </p:sp>
-      <p:sp>
-        <p:nvSpPr>
-          <p:cNvPr id="35" name="TextBox 34"/>
-          <p:cNvSpPr txBox="1"/>
-          <p:nvPr/>
-        </p:nvSpPr>
-        <p:spPr>
-          <a:xfrm>
-            <a:off x="731520" y="859536"/>
-            <a:ext cx="11157801" cy="483870"/>
-          </a:xfrm>
-          <a:prstGeom prst="rect">
-            <a:avLst/>
-          </a:prstGeom>
-          <a:noFill/>
-        </p:spPr>
-        <p:txBody>
-          <a:bodyPr wrap="square" lIns="0" rIns="0" tIns="0" bIns="0" anchor="t">
-            <a:spAutoFit/>
-          </a:bodyPr>
-          <a:lstStyle/>
-          <a:p>
-            <a:pPr algn="l">
-              <a:lnSpc>
-                <a:spcPts val="3450"/>
-              </a:lnSpc>
-            </a:pPr>
-            <a:r>
-              <a:rPr sz="3000" b="1">
-                <a:solidFill>
-                  <a:srgbClr val="1B2A4A"/>
-                </a:solidFill>
-                <a:latin typeface="Georgia"/>
-              </a:rPr>
-              <a:t>Asosiy atamalar</a:t>
-            </a:r>
-          </a:p>
-        </p:txBody>
-      </p:sp>
-      <p:sp>
-        <p:nvSpPr>
-          <p:cNvPr id="36" name="Rectangle 35"/>
-          <p:cNvSpPr/>
-          <p:nvPr/>
-        </p:nvSpPr>
-        <p:spPr>
-          <a:xfrm>
-            <a:off x="731520" y="1389126"/>
-            <a:ext cx="822960" cy="45720"/>
-          </a:xfrm>
-          <a:prstGeom prst="rect">
-            <a:avLst/>
-          </a:prstGeom>
-          <a:solidFill>
-            <a:srgbClr val="9E2A3A"/>
-          </a:solidFill>
-          <a:ln>
-            <a:noFill/>
-          </a:ln>
-          <a:effectLst/>
-        </p:spPr>
-        <p:style>
-          <a:lnRef idx="1">
-            <a:schemeClr val="accent1"/>
-          </a:lnRef>
-          <a:fillRef idx="3">
-            <a:schemeClr val="accent1"/>
-          </a:fillRef>
-          <a:effectRef idx="2">
-            <a:schemeClr val="accent1"/>
-          </a:effectRef>
-          <a:fontRef idx="minor">
-            <a:schemeClr val="lt1"/>
-          </a:fontRef>
-        </p:style>
-        <p:txBody>
-          <a:bodyPr rtlCol="0" anchor="ctr"/>
-          <a:lstStyle/>
-          <a:p>
-            <a:pPr algn="ctr"/>
-          </a:p>
-        </p:txBody>
-      </p:sp>
-      <p:sp>
-        <p:nvSpPr>
-          <p:cNvPr id="37" name="Rounded Rectangle 36"/>
-          <p:cNvSpPr/>
-          <p:nvPr/>
-        </p:nvSpPr>
-        <p:spPr>
-          <a:xfrm>
-            <a:off x="731520" y="1645158"/>
-            <a:ext cx="10728655" cy="2080641"/>
-          </a:xfrm>
-          <a:prstGeom prst="roundRect">
-            <a:avLst>
-              <a:gd name="adj" fmla="val 3515"/>
-            </a:avLst>
-          </a:prstGeom>
-          <a:solidFill>
-            <a:srgbClr val="FBF6EC"/>
-          </a:solidFill>
-          <a:ln w="12700">
-            <a:solidFill>
-              <a:srgbClr val="D8C8AE"/>
-            </a:solidFill>
-          </a:ln>
-          <a:effectLst/>
-        </p:spPr>
-        <p:style>
-          <a:lnRef idx="1">
-            <a:schemeClr val="accent1"/>
-          </a:lnRef>
-          <a:fillRef idx="3">
-            <a:schemeClr val="accent1"/>
-          </a:fillRef>
-          <a:effectRef idx="2">
-            <a:schemeClr val="accent1"/>
-          </a:effectRef>
-          <a:fontRef idx="minor">
-            <a:schemeClr val="lt1"/>
-          </a:fontRef>
-        </p:style>
-        <p:txBody>
-          <a:bodyPr rtlCol="0" anchor="ctr"/>
-          <a:lstStyle/>
-          <a:p>
-            <a:pPr algn="ctr"/>
-          </a:p>
-        </p:txBody>
-      </p:sp>
-      <p:sp>
-        <p:nvSpPr>
-          <p:cNvPr id="38" name="Rectangle 37"/>
-          <p:cNvSpPr/>
-          <p:nvPr/>
-        </p:nvSpPr>
-        <p:spPr>
-          <a:xfrm>
-            <a:off x="731520" y="1645158"/>
-            <a:ext cx="73152" cy="2080641"/>
-          </a:xfrm>
-          <a:prstGeom prst="rect">
-            <a:avLst/>
-          </a:prstGeom>
-          <a:solidFill>
-            <a:srgbClr val="9E2A3A"/>
-          </a:solidFill>
-          <a:ln>
-            <a:noFill/>
-          </a:ln>
-          <a:effectLst/>
-        </p:spPr>
-        <p:style>
-          <a:lnRef idx="1">
-            <a:schemeClr val="accent1"/>
-          </a:lnRef>
-          <a:fillRef idx="3">
-            <a:schemeClr val="accent1"/>
-          </a:fillRef>
-          <a:effectRef idx="2">
-            <a:schemeClr val="accent1"/>
-          </a:effectRef>
-          <a:fontRef idx="minor">
-            <a:schemeClr val="lt1"/>
-          </a:fontRef>
-        </p:style>
-        <p:txBody>
-          <a:bodyPr rtlCol="0" anchor="ctr"/>
-          <a:lstStyle/>
-          <a:p>
-            <a:pPr algn="ctr"/>
-          </a:p>
-        </p:txBody>
-      </p:sp>
-      <p:sp>
-        <p:nvSpPr>
-          <p:cNvPr id="39" name="TextBox 38"/>
-          <p:cNvSpPr txBox="1"/>
-          <p:nvPr/>
-        </p:nvSpPr>
-        <p:spPr>
-          <a:xfrm>
-            <a:off x="1005840" y="1809750"/>
-            <a:ext cx="10682313" cy="367029"/>
-          </a:xfrm>
-          <a:prstGeom prst="rect">
-            <a:avLst/>
-          </a:prstGeom>
-          <a:noFill/>
-        </p:spPr>
-        <p:txBody>
-          <a:bodyPr wrap="square" lIns="0" rIns="0" tIns="0" bIns="0" anchor="t">
-            <a:spAutoFit/>
-          </a:bodyPr>
-          <a:lstStyle/>
-          <a:p>
-            <a:pPr algn="l">
-              <a:lnSpc>
-                <a:spcPts val="2529"/>
-              </a:lnSpc>
-            </a:pPr>
-            <a:r>
-              <a:rPr sz="2200" b="1">
-                <a:solidFill>
-                  <a:srgbClr val="1B2A4A"/>
-                </a:solidFill>
-                <a:latin typeface="Georgia"/>
-              </a:rPr>
-              <a:t>Fuqaro muhofazasining asosiy signali</a:t>
-            </a:r>
-          </a:p>
-        </p:txBody>
-      </p:sp>
-      <p:sp>
-        <p:nvSpPr>
-          <p:cNvPr id="40" name="TextBox 39"/>
-          <p:cNvSpPr txBox="1"/>
-          <p:nvPr/>
-        </p:nvSpPr>
-        <p:spPr>
-          <a:xfrm>
-            <a:off x="1005840" y="2222500"/>
-            <a:ext cx="10682313" cy="359410"/>
-          </a:xfrm>
-          <a:prstGeom prst="rect">
-            <a:avLst/>
-          </a:prstGeom>
-          <a:noFill/>
-        </p:spPr>
-        <p:txBody>
-          <a:bodyPr wrap="square" lIns="0" rIns="0" tIns="0" bIns="0" anchor="t">
-            <a:spAutoFit/>
-          </a:bodyPr>
-          <a:lstStyle/>
-          <a:p>
-            <a:pPr algn="l">
-              <a:lnSpc>
-                <a:spcPts val="2470"/>
-              </a:lnSpc>
-            </a:pPr>
-            <a:r>
-              <a:rPr sz="1900" b="0">
-                <a:solidFill>
-                  <a:srgbClr val="3A4560"/>
-                </a:solidFill>
-                <a:latin typeface="Segoe UI"/>
-              </a:rPr>
-              <a:t>«Diqqat hammaga!». U sirenalar, korxona gudoklari va boshqa tovush vositalari orqali beriladi.</a:t>
-            </a:r>
-          </a:p>
-        </p:txBody>
-      </p:sp>
-      <p:sp>
-        <p:nvSpPr>
-          <p:cNvPr id="41" name="Rounded Rectangle 40"/>
-          <p:cNvSpPr/>
-          <p:nvPr/>
-        </p:nvSpPr>
-        <p:spPr>
-          <a:xfrm>
-            <a:off x="731520" y="3954398"/>
-            <a:ext cx="10728655" cy="2080641"/>
-          </a:xfrm>
-          <a:prstGeom prst="roundRect">
-            <a:avLst>
-              <a:gd name="adj" fmla="val 3515"/>
-            </a:avLst>
-          </a:prstGeom>
-          <a:solidFill>
-            <a:srgbClr val="FBF6EC"/>
-          </a:solidFill>
-          <a:ln w="12700">
-            <a:solidFill>
-              <a:srgbClr val="D8C8AE"/>
-            </a:solidFill>
-          </a:ln>
-          <a:effectLst/>
-        </p:spPr>
-        <p:style>
-          <a:lnRef idx="1">
-            <a:schemeClr val="accent1"/>
-          </a:lnRef>
-          <a:fillRef idx="3">
-            <a:schemeClr val="accent1"/>
-          </a:fillRef>
-          <a:effectRef idx="2">
-            <a:schemeClr val="accent1"/>
-          </a:effectRef>
-          <a:fontRef idx="minor">
-            <a:schemeClr val="lt1"/>
-          </a:fontRef>
-        </p:style>
-        <p:txBody>
-          <a:bodyPr rtlCol="0" anchor="ctr"/>
-          <a:lstStyle/>
-          <a:p>
-            <a:pPr algn="ctr"/>
-          </a:p>
-        </p:txBody>
-      </p:sp>
-      <p:sp>
-        <p:nvSpPr>
-          <p:cNvPr id="42" name="Rectangle 41"/>
-          <p:cNvSpPr/>
-          <p:nvPr/>
-        </p:nvSpPr>
-        <p:spPr>
-          <a:xfrm>
-            <a:off x="731520" y="3954398"/>
-            <a:ext cx="73152" cy="2080641"/>
-          </a:xfrm>
-          <a:prstGeom prst="rect">
-            <a:avLst/>
-          </a:prstGeom>
-          <a:solidFill>
-            <a:srgbClr val="9E2A3A"/>
-          </a:solidFill>
-          <a:ln>
-            <a:noFill/>
-          </a:ln>
-          <a:effectLst/>
-        </p:spPr>
-        <p:style>
-          <a:lnRef idx="1">
-            <a:schemeClr val="accent1"/>
-          </a:lnRef>
-          <a:fillRef idx="3">
-            <a:schemeClr val="accent1"/>
-          </a:fillRef>
-          <a:effectRef idx="2">
-            <a:schemeClr val="accent1"/>
-          </a:effectRef>
-          <a:fontRef idx="minor">
-            <a:schemeClr val="lt1"/>
-          </a:fontRef>
-        </p:style>
-        <p:txBody>
-          <a:bodyPr rtlCol="0" anchor="ctr"/>
-          <a:lstStyle/>
-          <a:p>
-            <a:pPr algn="ctr"/>
-          </a:p>
-        </p:txBody>
-      </p:sp>
-      <p:sp>
-        <p:nvSpPr>
-          <p:cNvPr id="43" name="TextBox 42"/>
-          <p:cNvSpPr txBox="1"/>
-          <p:nvPr/>
-        </p:nvSpPr>
-        <p:spPr>
-          <a:xfrm>
-            <a:off x="1005840" y="4118990"/>
-            <a:ext cx="10682313" cy="367029"/>
-          </a:xfrm>
-          <a:prstGeom prst="rect">
-            <a:avLst/>
-          </a:prstGeom>
-          <a:noFill/>
-        </p:spPr>
-        <p:txBody>
-          <a:bodyPr wrap="square" lIns="0" rIns="0" tIns="0" bIns="0" anchor="t">
-            <a:spAutoFit/>
-          </a:bodyPr>
-          <a:lstStyle/>
-          <a:p>
-            <a:pPr algn="l">
-              <a:lnSpc>
-                <a:spcPts val="2529"/>
-              </a:lnSpc>
-            </a:pPr>
-            <a:r>
-              <a:rPr sz="2200" b="1">
-                <a:solidFill>
-                  <a:srgbClr val="1B2A4A"/>
-                </a:solidFill>
-                <a:latin typeface="Georgia"/>
-              </a:rPr>
-              <a:t>Zilzila paytida asosiy tamoyil</a:t>
-            </a:r>
-          </a:p>
-        </p:txBody>
-      </p:sp>
-      <p:sp>
-        <p:nvSpPr>
-          <p:cNvPr id="44" name="TextBox 43"/>
-          <p:cNvSpPr txBox="1"/>
-          <p:nvPr/>
-        </p:nvSpPr>
-        <p:spPr>
-          <a:xfrm>
-            <a:off x="1005840" y="4531740"/>
-            <a:ext cx="10682313" cy="359410"/>
-          </a:xfrm>
-          <a:prstGeom prst="rect">
-            <a:avLst/>
-          </a:prstGeom>
-          <a:noFill/>
-        </p:spPr>
-        <p:txBody>
-          <a:bodyPr wrap="square" lIns="0" rIns="0" tIns="0" bIns="0" anchor="t">
-            <a:spAutoFit/>
-          </a:bodyPr>
-          <a:lstStyle/>
-          <a:p>
-            <a:pPr algn="l">
-              <a:lnSpc>
-                <a:spcPts val="2470"/>
-              </a:lnSpc>
-            </a:pPr>
-            <a:r>
-              <a:rPr sz="1900" b="0">
-                <a:solidFill>
-                  <a:srgbClr val="3A4560"/>
-                </a:solidFill>
-                <a:latin typeface="Segoe UI"/>
-              </a:rPr>
-              <a:t>«Yerga tush, panalan, ushlab tur»:</a:t>
-            </a:r>
-          </a:p>
-        </p:txBody>
-      </p:sp>
-    </p:spTree>
-  </p:cSld>
-  <p:clrMapOvr>
-    <a:masterClrMapping/>
-  </p:clrMapOvr>
-</p:sld>
-</file>
-
-<file path=ppt/slides/slide12.xml><?xml version="1.0" encoding="utf-8"?>
-<p:sld xmlns:a="http://schemas.openxmlformats.org/drawingml/2006/main" xmlns:p="http://schemas.openxmlformats.org/presentationml/2006/main" xmlns:r="http://schemas.openxmlformats.org/officeDocument/2006/relationships">
-  <p:cSld>
-    <p:spTree>
-      <p:nvGrpSpPr>
-        <p:cNvPr id="1" name=""/>
-        <p:cNvGrpSpPr/>
-        <p:nvPr/>
-      </p:nvGrpSpPr>
-      <p:grpSpPr/>
-      <p:sp>
-        <p:nvSpPr>
-          <p:cNvPr id="2" name="Rectangle 1"/>
-          <p:cNvSpPr/>
-          <p:nvPr/>
-        </p:nvSpPr>
-        <p:spPr>
-          <a:xfrm>
-            <a:off x="0" y="0"/>
-            <a:ext cx="12191695" cy="6858000"/>
-          </a:xfrm>
-          <a:prstGeom prst="rect">
-            <a:avLst/>
-          </a:prstGeom>
-          <a:solidFill>
-            <a:srgbClr val="F4EBDD"/>
-          </a:solidFill>
-          <a:ln>
-            <a:noFill/>
-          </a:ln>
-          <a:effectLst/>
-        </p:spPr>
-        <p:style>
-          <a:lnRef idx="1">
-            <a:schemeClr val="accent1"/>
-          </a:lnRef>
-          <a:fillRef idx="3">
-            <a:schemeClr val="accent1"/>
-          </a:fillRef>
-          <a:effectRef idx="2">
-            <a:schemeClr val="accent1"/>
-          </a:effectRef>
-          <a:fontRef idx="minor">
-            <a:schemeClr val="lt1"/>
-          </a:fontRef>
-        </p:style>
-        <p:txBody>
-          <a:bodyPr rtlCol="0" anchor="ctr"/>
-          <a:lstStyle/>
-          <a:p>
-            <a:pPr algn="ctr"/>
-          </a:p>
-        </p:txBody>
-      </p:sp>
-      <p:sp>
-        <p:nvSpPr>
-          <p:cNvPr id="3" name="Rectangle 2"/>
-          <p:cNvSpPr/>
-          <p:nvPr/>
-        </p:nvSpPr>
-        <p:spPr>
-          <a:xfrm>
-            <a:off x="0" y="0"/>
-            <a:ext cx="12191695" cy="128016"/>
-          </a:xfrm>
-          <a:prstGeom prst="rect">
-            <a:avLst/>
-          </a:prstGeom>
-          <a:solidFill>
-            <a:srgbClr val="9E2A3A"/>
-          </a:solidFill>
-          <a:ln>
-            <a:noFill/>
-          </a:ln>
-          <a:effectLst/>
-        </p:spPr>
-        <p:style>
-          <a:lnRef idx="1">
-            <a:schemeClr val="accent1"/>
-          </a:lnRef>
-          <a:fillRef idx="3">
-            <a:schemeClr val="accent1"/>
-          </a:fillRef>
-          <a:effectRef idx="2">
-            <a:schemeClr val="accent1"/>
-          </a:effectRef>
-          <a:fontRef idx="minor">
-            <a:schemeClr val="lt1"/>
-          </a:fontRef>
-        </p:style>
-        <p:txBody>
-          <a:bodyPr rtlCol="0" anchor="ctr"/>
-          <a:lstStyle/>
-          <a:p>
-            <a:pPr algn="ctr"/>
-          </a:p>
-        </p:txBody>
-      </p:sp>
-      <p:sp>
-        <p:nvSpPr>
-          <p:cNvPr id="4" name="Rectangle 3"/>
-          <p:cNvSpPr/>
-          <p:nvPr/>
-        </p:nvSpPr>
-        <p:spPr>
-          <a:xfrm rot="2700000">
-            <a:off x="183346" y="229066"/>
-            <a:ext cx="90507" cy="90507"/>
-          </a:xfrm>
-          <a:prstGeom prst="rect">
-            <a:avLst/>
-          </a:prstGeom>
-          <a:solidFill>
-            <a:srgbClr val="9E2A3A"/>
-          </a:solidFill>
-          <a:ln>
-            <a:noFill/>
-          </a:ln>
-          <a:effectLst/>
-        </p:spPr>
-        <p:style>
-          <a:lnRef idx="1">
-            <a:schemeClr val="accent1"/>
-          </a:lnRef>
-          <a:fillRef idx="3">
-            <a:schemeClr val="accent1"/>
-          </a:fillRef>
-          <a:effectRef idx="2">
-            <a:schemeClr val="accent1"/>
-          </a:effectRef>
-          <a:fontRef idx="minor">
-            <a:schemeClr val="lt1"/>
-          </a:fontRef>
-        </p:style>
-        <p:txBody>
-          <a:bodyPr rtlCol="0" anchor="ctr"/>
-          <a:lstStyle/>
-          <a:p>
-            <a:pPr algn="ctr"/>
-          </a:p>
-        </p:txBody>
-      </p:sp>
-      <p:sp>
-        <p:nvSpPr>
-          <p:cNvPr id="5" name="Rectangle 4"/>
-          <p:cNvSpPr/>
-          <p:nvPr/>
-        </p:nvSpPr>
-        <p:spPr>
-          <a:xfrm rot="2700000">
-            <a:off x="640546" y="229066"/>
-            <a:ext cx="90507" cy="90507"/>
-          </a:xfrm>
-          <a:prstGeom prst="rect">
-            <a:avLst/>
-          </a:prstGeom>
-          <a:solidFill>
-            <a:srgbClr val="B9862A"/>
-          </a:solidFill>
-          <a:ln>
-            <a:noFill/>
-          </a:ln>
-          <a:effectLst/>
-        </p:spPr>
-        <p:style>
-          <a:lnRef idx="1">
-            <a:schemeClr val="accent1"/>
-          </a:lnRef>
-          <a:fillRef idx="3">
-            <a:schemeClr val="accent1"/>
-          </a:fillRef>
-          <a:effectRef idx="2">
-            <a:schemeClr val="accent1"/>
-          </a:effectRef>
-          <a:fontRef idx="minor">
-            <a:schemeClr val="lt1"/>
-          </a:fontRef>
-        </p:style>
-        <p:txBody>
-          <a:bodyPr rtlCol="0" anchor="ctr"/>
-          <a:lstStyle/>
-          <a:p>
-            <a:pPr algn="ctr"/>
-          </a:p>
-        </p:txBody>
-      </p:sp>
-      <p:sp>
-        <p:nvSpPr>
-          <p:cNvPr id="6" name="Rectangle 5"/>
-          <p:cNvSpPr/>
-          <p:nvPr/>
-        </p:nvSpPr>
-        <p:spPr>
-          <a:xfrm rot="2700000">
-            <a:off x="1097746" y="229066"/>
-            <a:ext cx="90507" cy="90507"/>
-          </a:xfrm>
-          <a:prstGeom prst="rect">
-            <a:avLst/>
-          </a:prstGeom>
-          <a:solidFill>
-            <a:srgbClr val="9E2A3A"/>
-          </a:solidFill>
-          <a:ln>
-            <a:noFill/>
-          </a:ln>
-          <a:effectLst/>
-        </p:spPr>
-        <p:style>
-          <a:lnRef idx="1">
-            <a:schemeClr val="accent1"/>
-          </a:lnRef>
-          <a:fillRef idx="3">
-            <a:schemeClr val="accent1"/>
-          </a:fillRef>
-          <a:effectRef idx="2">
-            <a:schemeClr val="accent1"/>
-          </a:effectRef>
-          <a:fontRef idx="minor">
-            <a:schemeClr val="lt1"/>
-          </a:fontRef>
-        </p:style>
-        <p:txBody>
-          <a:bodyPr rtlCol="0" anchor="ctr"/>
-          <a:lstStyle/>
-          <a:p>
-            <a:pPr algn="ctr"/>
-          </a:p>
-        </p:txBody>
-      </p:sp>
-      <p:sp>
-        <p:nvSpPr>
-          <p:cNvPr id="7" name="Rectangle 6"/>
-          <p:cNvSpPr/>
-          <p:nvPr/>
-        </p:nvSpPr>
-        <p:spPr>
-          <a:xfrm rot="2700000">
-            <a:off x="1554946" y="229066"/>
-            <a:ext cx="90507" cy="90507"/>
-          </a:xfrm>
-          <a:prstGeom prst="rect">
-            <a:avLst/>
-          </a:prstGeom>
-          <a:solidFill>
-            <a:srgbClr val="B9862A"/>
-          </a:solidFill>
-          <a:ln>
-            <a:noFill/>
-          </a:ln>
-          <a:effectLst/>
-        </p:spPr>
-        <p:style>
-          <a:lnRef idx="1">
-            <a:schemeClr val="accent1"/>
-          </a:lnRef>
-          <a:fillRef idx="3">
-            <a:schemeClr val="accent1"/>
-          </a:fillRef>
-          <a:effectRef idx="2">
-            <a:schemeClr val="accent1"/>
-          </a:effectRef>
-          <a:fontRef idx="minor">
-            <a:schemeClr val="lt1"/>
-          </a:fontRef>
-        </p:style>
-        <p:txBody>
-          <a:bodyPr rtlCol="0" anchor="ctr"/>
-          <a:lstStyle/>
-          <a:p>
-            <a:pPr algn="ctr"/>
-          </a:p>
-        </p:txBody>
-      </p:sp>
-      <p:sp>
-        <p:nvSpPr>
-          <p:cNvPr id="8" name="Rectangle 7"/>
-          <p:cNvSpPr/>
-          <p:nvPr/>
-        </p:nvSpPr>
-        <p:spPr>
-          <a:xfrm rot="2700000">
-            <a:off x="2012146" y="229066"/>
-            <a:ext cx="90507" cy="90507"/>
-          </a:xfrm>
-          <a:prstGeom prst="rect">
-            <a:avLst/>
-          </a:prstGeom>
-          <a:solidFill>
-            <a:srgbClr val="9E2A3A"/>
-          </a:solidFill>
-          <a:ln>
-            <a:noFill/>
-          </a:ln>
-          <a:effectLst/>
-        </p:spPr>
-        <p:style>
-          <a:lnRef idx="1">
-            <a:schemeClr val="accent1"/>
-          </a:lnRef>
-          <a:fillRef idx="3">
-            <a:schemeClr val="accent1"/>
-          </a:fillRef>
-          <a:effectRef idx="2">
-            <a:schemeClr val="accent1"/>
-          </a:effectRef>
-          <a:fontRef idx="minor">
-            <a:schemeClr val="lt1"/>
-          </a:fontRef>
-        </p:style>
-        <p:txBody>
-          <a:bodyPr rtlCol="0" anchor="ctr"/>
-          <a:lstStyle/>
-          <a:p>
-            <a:pPr algn="ctr"/>
-          </a:p>
-        </p:txBody>
-      </p:sp>
-      <p:sp>
-        <p:nvSpPr>
-          <p:cNvPr id="9" name="Rectangle 8"/>
-          <p:cNvSpPr/>
-          <p:nvPr/>
-        </p:nvSpPr>
-        <p:spPr>
-          <a:xfrm rot="2700000">
-            <a:off x="2469346" y="229066"/>
-            <a:ext cx="90507" cy="90507"/>
-          </a:xfrm>
-          <a:prstGeom prst="rect">
-            <a:avLst/>
-          </a:prstGeom>
-          <a:solidFill>
-            <a:srgbClr val="B9862A"/>
-          </a:solidFill>
-          <a:ln>
-            <a:noFill/>
-          </a:ln>
-          <a:effectLst/>
-        </p:spPr>
-        <p:style>
-          <a:lnRef idx="1">
-            <a:schemeClr val="accent1"/>
-          </a:lnRef>
-          <a:fillRef idx="3">
-            <a:schemeClr val="accent1"/>
-          </a:fillRef>
-          <a:effectRef idx="2">
-            <a:schemeClr val="accent1"/>
-          </a:effectRef>
-          <a:fontRef idx="minor">
-            <a:schemeClr val="lt1"/>
-          </a:fontRef>
-        </p:style>
-        <p:txBody>
-          <a:bodyPr rtlCol="0" anchor="ctr"/>
-          <a:lstStyle/>
-          <a:p>
-            <a:pPr algn="ctr"/>
-          </a:p>
-        </p:txBody>
-      </p:sp>
-      <p:sp>
-        <p:nvSpPr>
-          <p:cNvPr id="10" name="Rectangle 9"/>
-          <p:cNvSpPr/>
-          <p:nvPr/>
-        </p:nvSpPr>
-        <p:spPr>
-          <a:xfrm rot="2700000">
-            <a:off x="2926546" y="229066"/>
-            <a:ext cx="90507" cy="90507"/>
-          </a:xfrm>
-          <a:prstGeom prst="rect">
-            <a:avLst/>
-          </a:prstGeom>
-          <a:solidFill>
-            <a:srgbClr val="9E2A3A"/>
-          </a:solidFill>
-          <a:ln>
-            <a:noFill/>
-          </a:ln>
-          <a:effectLst/>
-        </p:spPr>
-        <p:style>
-          <a:lnRef idx="1">
-            <a:schemeClr val="accent1"/>
-          </a:lnRef>
-          <a:fillRef idx="3">
-            <a:schemeClr val="accent1"/>
-          </a:fillRef>
-          <a:effectRef idx="2">
-            <a:schemeClr val="accent1"/>
-          </a:effectRef>
-          <a:fontRef idx="minor">
-            <a:schemeClr val="lt1"/>
-          </a:fontRef>
-        </p:style>
-        <p:txBody>
-          <a:bodyPr rtlCol="0" anchor="ctr"/>
-          <a:lstStyle/>
-          <a:p>
-            <a:pPr algn="ctr"/>
-          </a:p>
-        </p:txBody>
-      </p:sp>
-      <p:sp>
-        <p:nvSpPr>
-          <p:cNvPr id="11" name="Rectangle 10"/>
-          <p:cNvSpPr/>
-          <p:nvPr/>
-        </p:nvSpPr>
-        <p:spPr>
-          <a:xfrm rot="2700000">
-            <a:off x="3383746" y="229066"/>
-            <a:ext cx="90507" cy="90507"/>
-          </a:xfrm>
-          <a:prstGeom prst="rect">
-            <a:avLst/>
-          </a:prstGeom>
-          <a:solidFill>
-            <a:srgbClr val="B9862A"/>
-          </a:solidFill>
-          <a:ln>
-            <a:noFill/>
-          </a:ln>
-          <a:effectLst/>
-        </p:spPr>
-        <p:style>
-          <a:lnRef idx="1">
-            <a:schemeClr val="accent1"/>
-          </a:lnRef>
-          <a:fillRef idx="3">
-            <a:schemeClr val="accent1"/>
-          </a:fillRef>
-          <a:effectRef idx="2">
-            <a:schemeClr val="accent1"/>
-          </a:effectRef>
-          <a:fontRef idx="minor">
-            <a:schemeClr val="lt1"/>
-          </a:fontRef>
-        </p:style>
-        <p:txBody>
-          <a:bodyPr rtlCol="0" anchor="ctr"/>
-          <a:lstStyle/>
-          <a:p>
-            <a:pPr algn="ctr"/>
-          </a:p>
-        </p:txBody>
-      </p:sp>
-      <p:sp>
-        <p:nvSpPr>
-          <p:cNvPr id="12" name="Rectangle 11"/>
-          <p:cNvSpPr/>
-          <p:nvPr/>
-        </p:nvSpPr>
-        <p:spPr>
-          <a:xfrm rot="2700000">
-            <a:off x="3840946" y="229066"/>
-            <a:ext cx="90507" cy="90507"/>
-          </a:xfrm>
-          <a:prstGeom prst="rect">
-            <a:avLst/>
-          </a:prstGeom>
-          <a:solidFill>
-            <a:srgbClr val="9E2A3A"/>
-          </a:solidFill>
-          <a:ln>
-            <a:noFill/>
-          </a:ln>
-          <a:effectLst/>
-        </p:spPr>
-        <p:style>
-          <a:lnRef idx="1">
-            <a:schemeClr val="accent1"/>
-          </a:lnRef>
-          <a:fillRef idx="3">
-            <a:schemeClr val="accent1"/>
-          </a:fillRef>
-          <a:effectRef idx="2">
-            <a:schemeClr val="accent1"/>
-          </a:effectRef>
-          <a:fontRef idx="minor">
-            <a:schemeClr val="lt1"/>
-          </a:fontRef>
-        </p:style>
-        <p:txBody>
-          <a:bodyPr rtlCol="0" anchor="ctr"/>
-          <a:lstStyle/>
-          <a:p>
-            <a:pPr algn="ctr"/>
-          </a:p>
-        </p:txBody>
-      </p:sp>
-      <p:sp>
-        <p:nvSpPr>
-          <p:cNvPr id="13" name="Rectangle 12"/>
-          <p:cNvSpPr/>
-          <p:nvPr/>
-        </p:nvSpPr>
-        <p:spPr>
-          <a:xfrm rot="2700000">
-            <a:off x="4298146" y="229066"/>
-            <a:ext cx="90507" cy="90507"/>
-          </a:xfrm>
-          <a:prstGeom prst="rect">
-            <a:avLst/>
-          </a:prstGeom>
-          <a:solidFill>
-            <a:srgbClr val="B9862A"/>
-          </a:solidFill>
-          <a:ln>
-            <a:noFill/>
-          </a:ln>
-          <a:effectLst/>
-        </p:spPr>
-        <p:style>
-          <a:lnRef idx="1">
-            <a:schemeClr val="accent1"/>
-          </a:lnRef>
-          <a:fillRef idx="3">
-            <a:schemeClr val="accent1"/>
-          </a:fillRef>
-          <a:effectRef idx="2">
-            <a:schemeClr val="accent1"/>
-          </a:effectRef>
-          <a:fontRef idx="minor">
-            <a:schemeClr val="lt1"/>
-          </a:fontRef>
-        </p:style>
-        <p:txBody>
-          <a:bodyPr rtlCol="0" anchor="ctr"/>
-          <a:lstStyle/>
-          <a:p>
-            <a:pPr algn="ctr"/>
-          </a:p>
-        </p:txBody>
-      </p:sp>
-      <p:sp>
-        <p:nvSpPr>
-          <p:cNvPr id="14" name="Rectangle 13"/>
-          <p:cNvSpPr/>
-          <p:nvPr/>
-        </p:nvSpPr>
-        <p:spPr>
-          <a:xfrm rot="2700000">
-            <a:off x="4755346" y="229066"/>
-            <a:ext cx="90507" cy="90507"/>
-          </a:xfrm>
-          <a:prstGeom prst="rect">
-            <a:avLst/>
-          </a:prstGeom>
-          <a:solidFill>
-            <a:srgbClr val="9E2A3A"/>
-          </a:solidFill>
-          <a:ln>
-            <a:noFill/>
-          </a:ln>
-          <a:effectLst/>
-        </p:spPr>
-        <p:style>
-          <a:lnRef idx="1">
-            <a:schemeClr val="accent1"/>
-          </a:lnRef>
-          <a:fillRef idx="3">
-            <a:schemeClr val="accent1"/>
-          </a:fillRef>
-          <a:effectRef idx="2">
-            <a:schemeClr val="accent1"/>
-          </a:effectRef>
-          <a:fontRef idx="minor">
-            <a:schemeClr val="lt1"/>
-          </a:fontRef>
-        </p:style>
-        <p:txBody>
-          <a:bodyPr rtlCol="0" anchor="ctr"/>
-          <a:lstStyle/>
-          <a:p>
-            <a:pPr algn="ctr"/>
-          </a:p>
-        </p:txBody>
-      </p:sp>
-      <p:sp>
-        <p:nvSpPr>
-          <p:cNvPr id="15" name="Rectangle 14"/>
-          <p:cNvSpPr/>
-          <p:nvPr/>
-        </p:nvSpPr>
-        <p:spPr>
-          <a:xfrm rot="2700000">
-            <a:off x="5212546" y="229066"/>
-            <a:ext cx="90507" cy="90507"/>
-          </a:xfrm>
-          <a:prstGeom prst="rect">
-            <a:avLst/>
-          </a:prstGeom>
-          <a:solidFill>
-            <a:srgbClr val="B9862A"/>
-          </a:solidFill>
-          <a:ln>
-            <a:noFill/>
-          </a:ln>
-          <a:effectLst/>
-        </p:spPr>
-        <p:style>
-          <a:lnRef idx="1">
-            <a:schemeClr val="accent1"/>
-          </a:lnRef>
-          <a:fillRef idx="3">
-            <a:schemeClr val="accent1"/>
-          </a:fillRef>
-          <a:effectRef idx="2">
-            <a:schemeClr val="accent1"/>
-          </a:effectRef>
-          <a:fontRef idx="minor">
-            <a:schemeClr val="lt1"/>
-          </a:fontRef>
-        </p:style>
-        <p:txBody>
-          <a:bodyPr rtlCol="0" anchor="ctr"/>
-          <a:lstStyle/>
-          <a:p>
-            <a:pPr algn="ctr"/>
-          </a:p>
-        </p:txBody>
-      </p:sp>
-      <p:sp>
-        <p:nvSpPr>
-          <p:cNvPr id="16" name="Rectangle 15"/>
-          <p:cNvSpPr/>
-          <p:nvPr/>
-        </p:nvSpPr>
-        <p:spPr>
-          <a:xfrm rot="2700000">
-            <a:off x="5669746" y="229066"/>
-            <a:ext cx="90507" cy="90507"/>
-          </a:xfrm>
-          <a:prstGeom prst="rect">
-            <a:avLst/>
-          </a:prstGeom>
-          <a:solidFill>
-            <a:srgbClr val="9E2A3A"/>
-          </a:solidFill>
-          <a:ln>
-            <a:noFill/>
-          </a:ln>
-          <a:effectLst/>
-        </p:spPr>
-        <p:style>
-          <a:lnRef idx="1">
-            <a:schemeClr val="accent1"/>
-          </a:lnRef>
-          <a:fillRef idx="3">
-            <a:schemeClr val="accent1"/>
-          </a:fillRef>
-          <a:effectRef idx="2">
-            <a:schemeClr val="accent1"/>
-          </a:effectRef>
-          <a:fontRef idx="minor">
-            <a:schemeClr val="lt1"/>
-          </a:fontRef>
-        </p:style>
-        <p:txBody>
-          <a:bodyPr rtlCol="0" anchor="ctr"/>
-          <a:lstStyle/>
-          <a:p>
-            <a:pPr algn="ctr"/>
-          </a:p>
-        </p:txBody>
-      </p:sp>
-      <p:sp>
-        <p:nvSpPr>
-          <p:cNvPr id="17" name="Rectangle 16"/>
-          <p:cNvSpPr/>
-          <p:nvPr/>
-        </p:nvSpPr>
-        <p:spPr>
-          <a:xfrm rot="2700000">
-            <a:off x="6126946" y="229066"/>
-            <a:ext cx="90507" cy="90507"/>
-          </a:xfrm>
-          <a:prstGeom prst="rect">
-            <a:avLst/>
-          </a:prstGeom>
-          <a:solidFill>
-            <a:srgbClr val="B9862A"/>
-          </a:solidFill>
-          <a:ln>
-            <a:noFill/>
-          </a:ln>
-          <a:effectLst/>
-        </p:spPr>
-        <p:style>
-          <a:lnRef idx="1">
-            <a:schemeClr val="accent1"/>
-          </a:lnRef>
-          <a:fillRef idx="3">
-            <a:schemeClr val="accent1"/>
-          </a:fillRef>
-          <a:effectRef idx="2">
-            <a:schemeClr val="accent1"/>
-          </a:effectRef>
-          <a:fontRef idx="minor">
-            <a:schemeClr val="lt1"/>
-          </a:fontRef>
-        </p:style>
-        <p:txBody>
-          <a:bodyPr rtlCol="0" anchor="ctr"/>
-          <a:lstStyle/>
-          <a:p>
-            <a:pPr algn="ctr"/>
-          </a:p>
-        </p:txBody>
-      </p:sp>
-      <p:sp>
-        <p:nvSpPr>
-          <p:cNvPr id="18" name="Rectangle 17"/>
-          <p:cNvSpPr/>
-          <p:nvPr/>
-        </p:nvSpPr>
-        <p:spPr>
-          <a:xfrm rot="2700000">
-            <a:off x="6584146" y="229066"/>
-            <a:ext cx="90507" cy="90507"/>
-          </a:xfrm>
-          <a:prstGeom prst="rect">
-            <a:avLst/>
-          </a:prstGeom>
-          <a:solidFill>
-            <a:srgbClr val="9E2A3A"/>
-          </a:solidFill>
-          <a:ln>
-            <a:noFill/>
-          </a:ln>
-          <a:effectLst/>
-        </p:spPr>
-        <p:style>
-          <a:lnRef idx="1">
-            <a:schemeClr val="accent1"/>
-          </a:lnRef>
-          <a:fillRef idx="3">
-            <a:schemeClr val="accent1"/>
-          </a:fillRef>
-          <a:effectRef idx="2">
-            <a:schemeClr val="accent1"/>
-          </a:effectRef>
-          <a:fontRef idx="minor">
-            <a:schemeClr val="lt1"/>
-          </a:fontRef>
-        </p:style>
-        <p:txBody>
-          <a:bodyPr rtlCol="0" anchor="ctr"/>
-          <a:lstStyle/>
-          <a:p>
-            <a:pPr algn="ctr"/>
-          </a:p>
-        </p:txBody>
-      </p:sp>
-      <p:sp>
-        <p:nvSpPr>
-          <p:cNvPr id="19" name="Rectangle 18"/>
-          <p:cNvSpPr/>
-          <p:nvPr/>
-        </p:nvSpPr>
-        <p:spPr>
-          <a:xfrm rot="2700000">
-            <a:off x="7041346" y="229066"/>
-            <a:ext cx="90507" cy="90507"/>
-          </a:xfrm>
-          <a:prstGeom prst="rect">
-            <a:avLst/>
-          </a:prstGeom>
-          <a:solidFill>
-            <a:srgbClr val="B9862A"/>
-          </a:solidFill>
-          <a:ln>
-            <a:noFill/>
-          </a:ln>
-          <a:effectLst/>
-        </p:spPr>
-        <p:style>
-          <a:lnRef idx="1">
-            <a:schemeClr val="accent1"/>
-          </a:lnRef>
-          <a:fillRef idx="3">
-            <a:schemeClr val="accent1"/>
-          </a:fillRef>
-          <a:effectRef idx="2">
-            <a:schemeClr val="accent1"/>
-          </a:effectRef>
-          <a:fontRef idx="minor">
-            <a:schemeClr val="lt1"/>
-          </a:fontRef>
-        </p:style>
-        <p:txBody>
-          <a:bodyPr rtlCol="0" anchor="ctr"/>
-          <a:lstStyle/>
-          <a:p>
-            <a:pPr algn="ctr"/>
-          </a:p>
-        </p:txBody>
-      </p:sp>
-      <p:sp>
-        <p:nvSpPr>
-          <p:cNvPr id="20" name="Rectangle 19"/>
-          <p:cNvSpPr/>
-          <p:nvPr/>
-        </p:nvSpPr>
-        <p:spPr>
-          <a:xfrm rot="2700000">
-            <a:off x="7498546" y="229066"/>
-            <a:ext cx="90507" cy="90507"/>
-          </a:xfrm>
-          <a:prstGeom prst="rect">
-            <a:avLst/>
-          </a:prstGeom>
-          <a:solidFill>
-            <a:srgbClr val="9E2A3A"/>
-          </a:solidFill>
-          <a:ln>
-            <a:noFill/>
-          </a:ln>
-          <a:effectLst/>
-        </p:spPr>
-        <p:style>
-          <a:lnRef idx="1">
-            <a:schemeClr val="accent1"/>
-          </a:lnRef>
-          <a:fillRef idx="3">
-            <a:schemeClr val="accent1"/>
-          </a:fillRef>
-          <a:effectRef idx="2">
-            <a:schemeClr val="accent1"/>
-          </a:effectRef>
-          <a:fontRef idx="minor">
-            <a:schemeClr val="lt1"/>
-          </a:fontRef>
-        </p:style>
-        <p:txBody>
-          <a:bodyPr rtlCol="0" anchor="ctr"/>
-          <a:lstStyle/>
-          <a:p>
-            <a:pPr algn="ctr"/>
-          </a:p>
-        </p:txBody>
-      </p:sp>
-      <p:sp>
-        <p:nvSpPr>
-          <p:cNvPr id="21" name="Rectangle 20"/>
-          <p:cNvSpPr/>
-          <p:nvPr/>
-        </p:nvSpPr>
-        <p:spPr>
-          <a:xfrm rot="2700000">
-            <a:off x="7955746" y="229066"/>
-            <a:ext cx="90507" cy="90507"/>
-          </a:xfrm>
-          <a:prstGeom prst="rect">
-            <a:avLst/>
-          </a:prstGeom>
-          <a:solidFill>
-            <a:srgbClr val="B9862A"/>
-          </a:solidFill>
-          <a:ln>
-            <a:noFill/>
-          </a:ln>
-          <a:effectLst/>
-        </p:spPr>
-        <p:style>
-          <a:lnRef idx="1">
-            <a:schemeClr val="accent1"/>
-          </a:lnRef>
-          <a:fillRef idx="3">
-            <a:schemeClr val="accent1"/>
-          </a:fillRef>
-          <a:effectRef idx="2">
-            <a:schemeClr val="accent1"/>
-          </a:effectRef>
-          <a:fontRef idx="minor">
-            <a:schemeClr val="lt1"/>
-          </a:fontRef>
-        </p:style>
-        <p:txBody>
-          <a:bodyPr rtlCol="0" anchor="ctr"/>
-          <a:lstStyle/>
-          <a:p>
-            <a:pPr algn="ctr"/>
-          </a:p>
-        </p:txBody>
-      </p:sp>
-      <p:sp>
-        <p:nvSpPr>
-          <p:cNvPr id="22" name="Rectangle 21"/>
-          <p:cNvSpPr/>
-          <p:nvPr/>
-        </p:nvSpPr>
-        <p:spPr>
-          <a:xfrm rot="2700000">
-            <a:off x="8412946" y="229066"/>
-            <a:ext cx="90507" cy="90507"/>
-          </a:xfrm>
-          <a:prstGeom prst="rect">
-            <a:avLst/>
-          </a:prstGeom>
-          <a:solidFill>
-            <a:srgbClr val="9E2A3A"/>
-          </a:solidFill>
-          <a:ln>
-            <a:noFill/>
-          </a:ln>
-          <a:effectLst/>
-        </p:spPr>
-        <p:style>
-          <a:lnRef idx="1">
-            <a:schemeClr val="accent1"/>
-          </a:lnRef>
-          <a:fillRef idx="3">
-            <a:schemeClr val="accent1"/>
-          </a:fillRef>
-          <a:effectRef idx="2">
-            <a:schemeClr val="accent1"/>
-          </a:effectRef>
-          <a:fontRef idx="minor">
-            <a:schemeClr val="lt1"/>
-          </a:fontRef>
-        </p:style>
-        <p:txBody>
-          <a:bodyPr rtlCol="0" anchor="ctr"/>
-          <a:lstStyle/>
-          <a:p>
-            <a:pPr algn="ctr"/>
-          </a:p>
-        </p:txBody>
-      </p:sp>
-      <p:sp>
-        <p:nvSpPr>
-          <p:cNvPr id="23" name="Rectangle 22"/>
-          <p:cNvSpPr/>
-          <p:nvPr/>
-        </p:nvSpPr>
-        <p:spPr>
-          <a:xfrm rot="2700000">
-            <a:off x="8870146" y="229066"/>
-            <a:ext cx="90507" cy="90507"/>
-          </a:xfrm>
-          <a:prstGeom prst="rect">
-            <a:avLst/>
-          </a:prstGeom>
-          <a:solidFill>
-            <a:srgbClr val="B9862A"/>
-          </a:solidFill>
-          <a:ln>
-            <a:noFill/>
-          </a:ln>
-          <a:effectLst/>
-        </p:spPr>
-        <p:style>
-          <a:lnRef idx="1">
-            <a:schemeClr val="accent1"/>
-          </a:lnRef>
-          <a:fillRef idx="3">
-            <a:schemeClr val="accent1"/>
-          </a:fillRef>
-          <a:effectRef idx="2">
-            <a:schemeClr val="accent1"/>
-          </a:effectRef>
-          <a:fontRef idx="minor">
-            <a:schemeClr val="lt1"/>
-          </a:fontRef>
-        </p:style>
-        <p:txBody>
-          <a:bodyPr rtlCol="0" anchor="ctr"/>
-          <a:lstStyle/>
-          <a:p>
-            <a:pPr algn="ctr"/>
-          </a:p>
-        </p:txBody>
-      </p:sp>
-      <p:sp>
-        <p:nvSpPr>
-          <p:cNvPr id="24" name="Rectangle 23"/>
-          <p:cNvSpPr/>
-          <p:nvPr/>
-        </p:nvSpPr>
-        <p:spPr>
-          <a:xfrm rot="2700000">
-            <a:off x="9327346" y="229066"/>
-            <a:ext cx="90507" cy="90507"/>
-          </a:xfrm>
-          <a:prstGeom prst="rect">
-            <a:avLst/>
-          </a:prstGeom>
-          <a:solidFill>
-            <a:srgbClr val="9E2A3A"/>
-          </a:solidFill>
-          <a:ln>
-            <a:noFill/>
-          </a:ln>
-          <a:effectLst/>
-        </p:spPr>
-        <p:style>
-          <a:lnRef idx="1">
-            <a:schemeClr val="accent1"/>
-          </a:lnRef>
-          <a:fillRef idx="3">
-            <a:schemeClr val="accent1"/>
-          </a:fillRef>
-          <a:effectRef idx="2">
-            <a:schemeClr val="accent1"/>
-          </a:effectRef>
-          <a:fontRef idx="minor">
-            <a:schemeClr val="lt1"/>
-          </a:fontRef>
-        </p:style>
-        <p:txBody>
-          <a:bodyPr rtlCol="0" anchor="ctr"/>
-          <a:lstStyle/>
-          <a:p>
-            <a:pPr algn="ctr"/>
-          </a:p>
-        </p:txBody>
-      </p:sp>
-      <p:sp>
-        <p:nvSpPr>
-          <p:cNvPr id="25" name="Rectangle 24"/>
-          <p:cNvSpPr/>
-          <p:nvPr/>
-        </p:nvSpPr>
-        <p:spPr>
-          <a:xfrm rot="2700000">
-            <a:off x="9784546" y="229066"/>
-            <a:ext cx="90507" cy="90507"/>
-          </a:xfrm>
-          <a:prstGeom prst="rect">
-            <a:avLst/>
-          </a:prstGeom>
-          <a:solidFill>
-            <a:srgbClr val="B9862A"/>
-          </a:solidFill>
-          <a:ln>
-            <a:noFill/>
-          </a:ln>
-          <a:effectLst/>
-        </p:spPr>
-        <p:style>
-          <a:lnRef idx="1">
-            <a:schemeClr val="accent1"/>
-          </a:lnRef>
-          <a:fillRef idx="3">
-            <a:schemeClr val="accent1"/>
-          </a:fillRef>
-          <a:effectRef idx="2">
-            <a:schemeClr val="accent1"/>
-          </a:effectRef>
-          <a:fontRef idx="minor">
-            <a:schemeClr val="lt1"/>
-          </a:fontRef>
-        </p:style>
-        <p:txBody>
-          <a:bodyPr rtlCol="0" anchor="ctr"/>
-          <a:lstStyle/>
-          <a:p>
-            <a:pPr algn="ctr"/>
-          </a:p>
-        </p:txBody>
-      </p:sp>
-      <p:sp>
-        <p:nvSpPr>
-          <p:cNvPr id="26" name="Rectangle 25"/>
-          <p:cNvSpPr/>
-          <p:nvPr/>
-        </p:nvSpPr>
-        <p:spPr>
-          <a:xfrm rot="2700000">
-            <a:off x="10241746" y="229066"/>
-            <a:ext cx="90507" cy="90507"/>
-          </a:xfrm>
-          <a:prstGeom prst="rect">
-            <a:avLst/>
-          </a:prstGeom>
-          <a:solidFill>
-            <a:srgbClr val="9E2A3A"/>
-          </a:solidFill>
-          <a:ln>
-            <a:noFill/>
-          </a:ln>
-          <a:effectLst/>
-        </p:spPr>
-        <p:style>
-          <a:lnRef idx="1">
-            <a:schemeClr val="accent1"/>
-          </a:lnRef>
-          <a:fillRef idx="3">
-            <a:schemeClr val="accent1"/>
-          </a:fillRef>
-          <a:effectRef idx="2">
-            <a:schemeClr val="accent1"/>
-          </a:effectRef>
-          <a:fontRef idx="minor">
-            <a:schemeClr val="lt1"/>
-          </a:fontRef>
-        </p:style>
-        <p:txBody>
-          <a:bodyPr rtlCol="0" anchor="ctr"/>
-          <a:lstStyle/>
-          <a:p>
-            <a:pPr algn="ctr"/>
-          </a:p>
-        </p:txBody>
-      </p:sp>
-      <p:sp>
-        <p:nvSpPr>
-          <p:cNvPr id="27" name="Rectangle 26"/>
-          <p:cNvSpPr/>
-          <p:nvPr/>
-        </p:nvSpPr>
-        <p:spPr>
-          <a:xfrm rot="2700000">
-            <a:off x="10698946" y="229066"/>
-            <a:ext cx="90507" cy="90507"/>
-          </a:xfrm>
-          <a:prstGeom prst="rect">
-            <a:avLst/>
-          </a:prstGeom>
-          <a:solidFill>
-            <a:srgbClr val="B9862A"/>
-          </a:solidFill>
-          <a:ln>
-            <a:noFill/>
-          </a:ln>
-          <a:effectLst/>
-        </p:spPr>
-        <p:style>
-          <a:lnRef idx="1">
-            <a:schemeClr val="accent1"/>
-          </a:lnRef>
-          <a:fillRef idx="3">
-            <a:schemeClr val="accent1"/>
-          </a:fillRef>
-          <a:effectRef idx="2">
-            <a:schemeClr val="accent1"/>
-          </a:effectRef>
-          <a:fontRef idx="minor">
-            <a:schemeClr val="lt1"/>
-          </a:fontRef>
-        </p:style>
-        <p:txBody>
-          <a:bodyPr rtlCol="0" anchor="ctr"/>
-          <a:lstStyle/>
-          <a:p>
-            <a:pPr algn="ctr"/>
-          </a:p>
-        </p:txBody>
-      </p:sp>
-      <p:sp>
-        <p:nvSpPr>
-          <p:cNvPr id="28" name="Rectangle 27"/>
-          <p:cNvSpPr/>
-          <p:nvPr/>
-        </p:nvSpPr>
-        <p:spPr>
-          <a:xfrm rot="2700000">
-            <a:off x="11156146" y="229066"/>
-            <a:ext cx="90507" cy="90507"/>
-          </a:xfrm>
-          <a:prstGeom prst="rect">
-            <a:avLst/>
-          </a:prstGeom>
-          <a:solidFill>
-            <a:srgbClr val="9E2A3A"/>
-          </a:solidFill>
-          <a:ln>
-            <a:noFill/>
-          </a:ln>
-          <a:effectLst/>
-        </p:spPr>
-        <p:style>
-          <a:lnRef idx="1">
-            <a:schemeClr val="accent1"/>
-          </a:lnRef>
-          <a:fillRef idx="3">
-            <a:schemeClr val="accent1"/>
-          </a:fillRef>
-          <a:effectRef idx="2">
-            <a:schemeClr val="accent1"/>
-          </a:effectRef>
-          <a:fontRef idx="minor">
-            <a:schemeClr val="lt1"/>
-          </a:fontRef>
-        </p:style>
-        <p:txBody>
-          <a:bodyPr rtlCol="0" anchor="ctr"/>
-          <a:lstStyle/>
-          <a:p>
-            <a:pPr algn="ctr"/>
-          </a:p>
-        </p:txBody>
-      </p:sp>
-      <p:sp>
-        <p:nvSpPr>
-          <p:cNvPr id="29" name="Rectangle 28"/>
-          <p:cNvSpPr/>
-          <p:nvPr/>
-        </p:nvSpPr>
-        <p:spPr>
-          <a:xfrm rot="2700000">
-            <a:off x="11613346" y="229066"/>
-            <a:ext cx="90507" cy="90507"/>
-          </a:xfrm>
-          <a:prstGeom prst="rect">
-            <a:avLst/>
-          </a:prstGeom>
-          <a:solidFill>
-            <a:srgbClr val="B9862A"/>
-          </a:solidFill>
-          <a:ln>
-            <a:noFill/>
-          </a:ln>
-          <a:effectLst/>
-        </p:spPr>
-        <p:style>
-          <a:lnRef idx="1">
-            <a:schemeClr val="accent1"/>
-          </a:lnRef>
-          <a:fillRef idx="3">
-            <a:schemeClr val="accent1"/>
-          </a:fillRef>
-          <a:effectRef idx="2">
-            <a:schemeClr val="accent1"/>
-          </a:effectRef>
-          <a:fontRef idx="minor">
-            <a:schemeClr val="lt1"/>
-          </a:fontRef>
-        </p:style>
-        <p:txBody>
-          <a:bodyPr rtlCol="0" anchor="ctr"/>
-          <a:lstStyle/>
-          <a:p>
-            <a:pPr algn="ctr"/>
-          </a:p>
-        </p:txBody>
-      </p:sp>
-      <p:sp>
-        <p:nvSpPr>
-          <p:cNvPr id="30" name="Rectangle 29"/>
-          <p:cNvSpPr/>
-          <p:nvPr/>
-        </p:nvSpPr>
-        <p:spPr>
-          <a:xfrm rot="2700000">
-            <a:off x="12070546" y="229066"/>
-            <a:ext cx="90507" cy="90507"/>
-          </a:xfrm>
-          <a:prstGeom prst="rect">
-            <a:avLst/>
-          </a:prstGeom>
-          <a:solidFill>
-            <a:srgbClr val="9E2A3A"/>
-          </a:solidFill>
-          <a:ln>
-            <a:noFill/>
-          </a:ln>
-          <a:effectLst/>
-        </p:spPr>
-        <p:style>
-          <a:lnRef idx="1">
-            <a:schemeClr val="accent1"/>
-          </a:lnRef>
-          <a:fillRef idx="3">
-            <a:schemeClr val="accent1"/>
-          </a:fillRef>
-          <a:effectRef idx="2">
-            <a:schemeClr val="accent1"/>
-          </a:effectRef>
-          <a:fontRef idx="minor">
-            <a:schemeClr val="lt1"/>
-          </a:fontRef>
-        </p:style>
-        <p:txBody>
-          <a:bodyPr rtlCol="0" anchor="ctr"/>
-          <a:lstStyle/>
-          <a:p>
-            <a:pPr algn="ctr"/>
-          </a:p>
-        </p:txBody>
-      </p:sp>
-      <p:sp>
-        <p:nvSpPr>
-          <p:cNvPr id="31" name="Rectangle 30"/>
-          <p:cNvSpPr/>
-          <p:nvPr/>
-        </p:nvSpPr>
-        <p:spPr>
-          <a:xfrm>
-            <a:off x="548640" y="6291072"/>
-            <a:ext cx="11094415" cy="10972"/>
-          </a:xfrm>
-          <a:prstGeom prst="rect">
-            <a:avLst/>
-          </a:prstGeom>
-          <a:solidFill>
-            <a:srgbClr val="D8C8AE"/>
-          </a:solidFill>
-          <a:ln>
-            <a:noFill/>
-          </a:ln>
-          <a:effectLst/>
-        </p:spPr>
-        <p:style>
-          <a:lnRef idx="1">
-            <a:schemeClr val="accent1"/>
-          </a:lnRef>
-          <a:fillRef idx="3">
-            <a:schemeClr val="accent1"/>
-          </a:fillRef>
-          <a:effectRef idx="2">
-            <a:schemeClr val="accent1"/>
-          </a:effectRef>
-          <a:fontRef idx="minor">
-            <a:schemeClr val="lt1"/>
-          </a:fontRef>
-        </p:style>
-        <p:txBody>
-          <a:bodyPr rtlCol="0" anchor="ctr"/>
-          <a:lstStyle/>
-          <a:p>
-            <a:pPr algn="ctr"/>
-          </a:p>
-        </p:txBody>
-      </p:sp>
-      <p:sp>
-        <p:nvSpPr>
-          <p:cNvPr id="32" name="TextBox 31"/>
-          <p:cNvSpPr txBox="1"/>
-          <p:nvPr/>
-        </p:nvSpPr>
-        <p:spPr>
-          <a:xfrm>
-            <a:off x="548640" y="6400800"/>
-            <a:ext cx="7607808" cy="204469"/>
-          </a:xfrm>
-          <a:prstGeom prst="rect">
-            <a:avLst/>
-          </a:prstGeom>
-          <a:noFill/>
-        </p:spPr>
-        <p:txBody>
-          <a:bodyPr wrap="square" lIns="0" rIns="0" tIns="0" bIns="0" anchor="t">
-            <a:spAutoFit/>
-          </a:bodyPr>
-          <a:lstStyle/>
-          <a:p>
-            <a:pPr algn="l">
-              <a:lnSpc>
-                <a:spcPts val="1250"/>
-              </a:lnSpc>
-            </a:pPr>
-            <a:r>
-              <a:rPr sz="1000" b="0">
-                <a:solidFill>
-                  <a:srgbClr val="6B6457"/>
-                </a:solidFill>
-                <a:latin typeface="Segoe UI"/>
-              </a:rPr>
-              <a:t>Mehnat muhofazasi va texnika xavfsizligi · 6-mavzu</a:t>
-            </a:r>
-          </a:p>
-        </p:txBody>
-      </p:sp>
-      <p:sp>
-        <p:nvSpPr>
-          <p:cNvPr id="33" name="TextBox 32"/>
-          <p:cNvSpPr txBox="1"/>
-          <p:nvPr/>
-        </p:nvSpPr>
-        <p:spPr>
-          <a:xfrm>
-            <a:off x="9814255" y="6400800"/>
-            <a:ext cx="1901952" cy="204469"/>
-          </a:xfrm>
-          <a:prstGeom prst="rect">
-            <a:avLst/>
-          </a:prstGeom>
-          <a:noFill/>
-        </p:spPr>
-        <p:txBody>
-          <a:bodyPr wrap="square" lIns="0" rIns="0" tIns="0" bIns="0" anchor="t">
-            <a:spAutoFit/>
-          </a:bodyPr>
-          <a:lstStyle/>
-          <a:p>
-            <a:pPr algn="r">
-              <a:lnSpc>
-                <a:spcPts val="1250"/>
-              </a:lnSpc>
-            </a:pPr>
-            <a:r>
-              <a:rPr sz="1000" b="1">
-                <a:solidFill>
-                  <a:srgbClr val="6B6457"/>
-                </a:solidFill>
-                <a:latin typeface="Segoe UI"/>
-              </a:rPr>
-              <a:t>12 / 13</a:t>
+              <a:t>11 / 12</a:t>
             </a:r>
           </a:p>
         </p:txBody>
@@ -10934,7 +9055,7 @@
 </p:sld>
 </file>
 
-<file path=ppt/slides/slide13.xml><?xml version="1.0" encoding="utf-8"?>
+<file path=ppt/slides/slide12.xml><?xml version="1.0" encoding="utf-8"?>
 <p:sld xmlns:a="http://schemas.openxmlformats.org/drawingml/2006/main" xmlns:p="http://schemas.openxmlformats.org/presentationml/2006/main" xmlns:r="http://schemas.openxmlformats.org/officeDocument/2006/relationships">
   <p:cSld>
     <p:spTree>
@@ -12337,7 +10458,7 @@
                 </a:solidFill>
                 <a:latin typeface="Segoe UI"/>
               </a:rPr>
-              <a:t>13 / 13</a:t>
+              <a:t>12 / 12</a:t>
             </a:r>
           </a:p>
         </p:txBody>
@@ -14046,7 +12167,7 @@
                 </a:solidFill>
                 <a:latin typeface="Segoe UI"/>
               </a:rPr>
-              <a:t>2 / 13</a:t>
+              <a:t>2 / 12</a:t>
             </a:r>
           </a:p>
         </p:txBody>
@@ -14382,7 +12503,7 @@
                 </a:solidFill>
                 <a:latin typeface="Georgia"/>
               </a:rPr>
-              <a:t>Favqulodda vaziyatlar (fv) turlari: tabiiy, texnogen,</a:t>
+              <a:t>Favqulodda vaziyatlar (FV) turlari: tabiiy, texnogen,</a:t>
             </a:r>
             <a:br/>
             <a:r>
@@ -14606,7 +12727,7 @@
                 </a:solidFill>
                 <a:latin typeface="Georgia"/>
               </a:rPr>
-              <a:t>Texnikum binosida fv yuz berganda xatti-harakatlar</a:t>
+              <a:t>Texnikum binosida FV yuz berganda xatti-harakatlar</a:t>
             </a:r>
           </a:p>
         </p:txBody>
@@ -16236,7 +14357,7 @@
                 </a:solidFill>
                 <a:latin typeface="Segoe UI"/>
               </a:rPr>
-              <a:t>3 / 13</a:t>
+              <a:t>3 / 12</a:t>
             </a:r>
           </a:p>
         </p:txBody>
@@ -18214,7 +16335,7 @@
                 </a:solidFill>
                 <a:latin typeface="Segoe UI"/>
               </a:rPr>
-              <a:t>4 / 13</a:t>
+              <a:t>4 / 12</a:t>
             </a:r>
           </a:p>
         </p:txBody>
@@ -19855,7 +17976,7 @@
                 </a:solidFill>
                 <a:latin typeface="Segoe UI"/>
               </a:rPr>
-              <a:t>5 / 13</a:t>
+              <a:t>5 / 12</a:t>
             </a:r>
           </a:p>
         </p:txBody>
@@ -21752,7 +19873,7 @@
                 </a:solidFill>
                 <a:latin typeface="Segoe UI"/>
               </a:rPr>
-              <a:t>6 / 13</a:t>
+              <a:t>6 / 12</a:t>
             </a:r>
           </a:p>
         </p:txBody>
@@ -23818,7 +21939,7 @@
                 </a:solidFill>
                 <a:latin typeface="Segoe UI"/>
               </a:rPr>
-              <a:t>7 / 13</a:t>
+              <a:t>7 / 12</a:t>
             </a:r>
           </a:p>
         </p:txBody>
@@ -25612,7 +23733,7 @@
                 </a:solidFill>
                 <a:latin typeface="Segoe UI"/>
               </a:rPr>
-              <a:t>8 / 13</a:t>
+              <a:t>8 / 12</a:t>
             </a:r>
           </a:p>
         </p:txBody>
@@ -27356,7 +25477,7 @@
                 </a:solidFill>
                 <a:latin typeface="Segoe UI"/>
               </a:rPr>
-              <a:t>9 / 13</a:t>
+              <a:t>9 / 12</a:t>
             </a:r>
           </a:p>
         </p:txBody>
